--- a/contents/Module-05-Security-and-User-Management.pptx
+++ b/contents/Module-05-Security-and-User-Management.pptx
@@ -8658,7 +8658,7 @@
         </p:nvSpPr>
         <p:spPr>
           <a:xfrm>
-            <a:off x="640080" y="3310128"/>
+            <a:off x="640080" y="3264408"/>
             <a:ext cx="292608" cy="292608"/>
           </a:xfrm>
           <a:prstGeom prst="rect">
@@ -8701,7 +8701,7 @@
         </p:nvSpPr>
         <p:spPr>
           <a:xfrm>
-            <a:off x="640080" y="3328416"/>
+            <a:off x="640080" y="3282696"/>
             <a:ext cx="292608" cy="256032"/>
           </a:xfrm>
           <a:prstGeom prst="rect">
@@ -8736,7 +8736,7 @@
         </p:nvSpPr>
         <p:spPr>
           <a:xfrm>
-            <a:off x="1051560" y="3291840"/>
+            <a:off x="1051560" y="3246120"/>
             <a:ext cx="6217920" cy="329184"/>
           </a:xfrm>
           <a:prstGeom prst="rect">
@@ -8771,7 +8771,7 @@
         </p:nvSpPr>
         <p:spPr>
           <a:xfrm>
-            <a:off x="640080" y="3767328"/>
+            <a:off x="640080" y="3675888"/>
             <a:ext cx="292608" cy="292608"/>
           </a:xfrm>
           <a:prstGeom prst="rect">
@@ -8814,7 +8814,7 @@
         </p:nvSpPr>
         <p:spPr>
           <a:xfrm>
-            <a:off x="640080" y="3785616"/>
+            <a:off x="640080" y="3694176"/>
             <a:ext cx="292608" cy="256032"/>
           </a:xfrm>
           <a:prstGeom prst="rect">
@@ -8849,7 +8849,7 @@
         </p:nvSpPr>
         <p:spPr>
           <a:xfrm>
-            <a:off x="1051560" y="3749040"/>
+            <a:off x="1051560" y="3657600"/>
             <a:ext cx="6217920" cy="329184"/>
           </a:xfrm>
           <a:prstGeom prst="rect">
@@ -8884,7 +8884,7 @@
         </p:nvSpPr>
         <p:spPr>
           <a:xfrm>
-            <a:off x="640080" y="4224528"/>
+            <a:off x="640080" y="4087368"/>
             <a:ext cx="292608" cy="292608"/>
           </a:xfrm>
           <a:prstGeom prst="rect">
@@ -8927,7 +8927,7 @@
         </p:nvSpPr>
         <p:spPr>
           <a:xfrm>
-            <a:off x="640080" y="4242816"/>
+            <a:off x="640080" y="4105656"/>
             <a:ext cx="292608" cy="256032"/>
           </a:xfrm>
           <a:prstGeom prst="rect">
@@ -8962,7 +8962,7 @@
         </p:nvSpPr>
         <p:spPr>
           <a:xfrm>
-            <a:off x="1051560" y="4206240"/>
+            <a:off x="1051560" y="4069080"/>
             <a:ext cx="6217920" cy="329184"/>
           </a:xfrm>
           <a:prstGeom prst="rect">
@@ -8997,7 +8997,7 @@
         </p:nvSpPr>
         <p:spPr>
           <a:xfrm>
-            <a:off x="640080" y="4681728"/>
+            <a:off x="640080" y="4498848"/>
             <a:ext cx="292608" cy="292608"/>
           </a:xfrm>
           <a:prstGeom prst="rect">
@@ -9040,7 +9040,7 @@
         </p:nvSpPr>
         <p:spPr>
           <a:xfrm>
-            <a:off x="640080" y="4700016"/>
+            <a:off x="640080" y="4517136"/>
             <a:ext cx="292608" cy="256032"/>
           </a:xfrm>
           <a:prstGeom prst="rect">
@@ -9075,7 +9075,7 @@
         </p:nvSpPr>
         <p:spPr>
           <a:xfrm>
-            <a:off x="1051560" y="4663440"/>
+            <a:off x="1051560" y="4480560"/>
             <a:ext cx="6217920" cy="329184"/>
           </a:xfrm>
           <a:prstGeom prst="rect">
@@ -9110,7 +9110,7 @@
         </p:nvSpPr>
         <p:spPr>
           <a:xfrm>
-            <a:off x="640080" y="5138928"/>
+            <a:off x="640080" y="4910328"/>
             <a:ext cx="292608" cy="292608"/>
           </a:xfrm>
           <a:prstGeom prst="rect">
@@ -9153,7 +9153,7 @@
         </p:nvSpPr>
         <p:spPr>
           <a:xfrm>
-            <a:off x="640080" y="5157216"/>
+            <a:off x="640080" y="4928616"/>
             <a:ext cx="292608" cy="256032"/>
           </a:xfrm>
           <a:prstGeom prst="rect">
@@ -9188,7 +9188,7 @@
         </p:nvSpPr>
         <p:spPr>
           <a:xfrm>
-            <a:off x="1051560" y="5120640"/>
+            <a:off x="1051560" y="4892040"/>
             <a:ext cx="6217920" cy="329184"/>
           </a:xfrm>
           <a:prstGeom prst="rect">
@@ -9223,7 +9223,7 @@
         </p:nvSpPr>
         <p:spPr>
           <a:xfrm>
-            <a:off x="640080" y="5596128"/>
+            <a:off x="640080" y="5321808"/>
             <a:ext cx="292608" cy="292608"/>
           </a:xfrm>
           <a:prstGeom prst="rect">
@@ -9266,7 +9266,7 @@
         </p:nvSpPr>
         <p:spPr>
           <a:xfrm>
-            <a:off x="640080" y="5614416"/>
+            <a:off x="640080" y="5340096"/>
             <a:ext cx="292608" cy="256032"/>
           </a:xfrm>
           <a:prstGeom prst="rect">
@@ -9301,7 +9301,7 @@
         </p:nvSpPr>
         <p:spPr>
           <a:xfrm>
-            <a:off x="1051560" y="5577840"/>
+            <a:off x="1051560" y="5303520"/>
             <a:ext cx="6217920" cy="329184"/>
           </a:xfrm>
           <a:prstGeom prst="rect">
@@ -9336,7 +9336,7 @@
         </p:nvSpPr>
         <p:spPr>
           <a:xfrm>
-            <a:off x="640080" y="6053328"/>
+            <a:off x="640080" y="5733288"/>
             <a:ext cx="292608" cy="292608"/>
           </a:xfrm>
           <a:prstGeom prst="rect">
@@ -9379,7 +9379,7 @@
         </p:nvSpPr>
         <p:spPr>
           <a:xfrm>
-            <a:off x="640080" y="6071616"/>
+            <a:off x="640080" y="5751576"/>
             <a:ext cx="292608" cy="256032"/>
           </a:xfrm>
           <a:prstGeom prst="rect">
@@ -9414,7 +9414,7 @@
         </p:nvSpPr>
         <p:spPr>
           <a:xfrm>
-            <a:off x="1051560" y="6035040"/>
+            <a:off x="1051560" y="5715000"/>
             <a:ext cx="6217920" cy="329184"/>
           </a:xfrm>
           <a:prstGeom prst="rect">
